--- a/material/prents.pptx
+++ b/material/prents.pptx
@@ -112,6 +112,11 @@
       </a:defRPr>
     </a:lvl9pPr>
   </p:defaultTextStyle>
+  <p:extLst>
+    <p:ext uri="{EFAFB233-063F-42B5-8137-9DF3F51BA10A}">
+      <p15:sldGuideLst xmlns:p15="http://schemas.microsoft.com/office/powerpoint/2012/main"/>
+    </p:ext>
+  </p:extLst>
 </p:presentation>
 </file>
 
@@ -197,7 +202,7 @@
           <a:p>
             <a:fld id="{C70E3A92-BE59-3B47-92DF-23B9479D1B6A}" type="datetimeFigureOut">
               <a:rPr lang="de-DE" smtClean="0"/>
-              <a:t>15.03.26</a:t>
+              <a:t>17.03.26</a:t>
             </a:fld>
             <a:endParaRPr lang="de-DE"/>
           </a:p>
@@ -1203,7 +1208,7 @@
           <a:p>
             <a:fld id="{E31BA835-12AC-4E8F-955A-EA3F4DE2791F}" type="datetime1">
               <a:rPr lang="en-US" smtClean="0"/>
-              <a:t>3/15/26</a:t>
+              <a:t>3/17/26</a:t>
             </a:fld>
             <a:endParaRPr lang="en-US"/>
           </a:p>
@@ -1374,7 +1379,7 @@
           <a:p>
             <a:fld id="{E31BA835-12AC-4E8F-955A-EA3F4DE2791F}" type="datetime1">
               <a:rPr lang="en-US" smtClean="0"/>
-              <a:t>3/15/26</a:t>
+              <a:t>3/17/26</a:t>
             </a:fld>
             <a:endParaRPr lang="en-US"/>
           </a:p>
@@ -1555,7 +1560,7 @@
           <a:p>
             <a:fld id="{E31BA835-12AC-4E8F-955A-EA3F4DE2791F}" type="datetime1">
               <a:rPr lang="en-US" smtClean="0"/>
-              <a:t>3/15/26</a:t>
+              <a:t>3/17/26</a:t>
             </a:fld>
             <a:endParaRPr lang="en-US"/>
           </a:p>
@@ -1734,7 +1739,7 @@
           <a:p>
             <a:fld id="{4517034F-E54B-704B-A585-D93224944678}" type="datetimeFigureOut">
               <a:rPr lang="de-DE" smtClean="0"/>
-              <a:t>15.03.26</a:t>
+              <a:t>17.03.26</a:t>
             </a:fld>
             <a:endParaRPr lang="de-DE"/>
           </a:p>
@@ -2003,7 +2008,7 @@
           <a:p>
             <a:fld id="{E31BA835-12AC-4E8F-955A-EA3F4DE2791F}" type="datetime1">
               <a:rPr lang="en-US" smtClean="0"/>
-              <a:t>3/15/26</a:t>
+              <a:t>3/17/26</a:t>
             </a:fld>
             <a:endParaRPr lang="en-US"/>
           </a:p>
@@ -2236,7 +2241,7 @@
           <a:p>
             <a:fld id="{4517034F-E54B-704B-A585-D93224944678}" type="datetimeFigureOut">
               <a:rPr lang="de-DE" smtClean="0"/>
-              <a:t>15.03.26</a:t>
+              <a:t>17.03.26</a:t>
             </a:fld>
             <a:endParaRPr lang="de-DE"/>
           </a:p>
@@ -2592,7 +2597,7 @@
           <a:p>
             <a:fld id="{E31BA835-12AC-4E8F-955A-EA3F4DE2791F}" type="datetime1">
               <a:rPr lang="en-US" smtClean="0"/>
-              <a:t>3/15/26</a:t>
+              <a:t>3/17/26</a:t>
             </a:fld>
             <a:endParaRPr lang="en-US"/>
           </a:p>
@@ -2734,7 +2739,7 @@
           <a:p>
             <a:fld id="{4517034F-E54B-704B-A585-D93224944678}" type="datetimeFigureOut">
               <a:rPr lang="de-DE" smtClean="0"/>
-              <a:t>15.03.26</a:t>
+              <a:t>17.03.26</a:t>
             </a:fld>
             <a:endParaRPr lang="de-DE"/>
           </a:p>
@@ -2830,7 +2835,7 @@
           <a:p>
             <a:fld id="{4517034F-E54B-704B-A585-D93224944678}" type="datetimeFigureOut">
               <a:rPr lang="de-DE" smtClean="0"/>
-              <a:t>15.03.26</a:t>
+              <a:t>17.03.26</a:t>
             </a:fld>
             <a:endParaRPr lang="de-DE"/>
           </a:p>
@@ -3188,7 +3193,7 @@
           <a:p>
             <a:fld id="{E31BA835-12AC-4E8F-955A-EA3F4DE2791F}" type="datetime1">
               <a:rPr lang="en-US" smtClean="0"/>
-              <a:t>3/15/26</a:t>
+              <a:t>3/17/26</a:t>
             </a:fld>
             <a:endParaRPr lang="en-US"/>
           </a:p>
@@ -3545,7 +3550,7 @@
           <a:p>
             <a:fld id="{E31BA835-12AC-4E8F-955A-EA3F4DE2791F}" type="datetime1">
               <a:rPr lang="en-US" smtClean="0"/>
-              <a:t>3/15/26</a:t>
+              <a:t>3/17/26</a:t>
             </a:fld>
             <a:endParaRPr lang="en-US"/>
           </a:p>
@@ -3786,7 +3791,7 @@
           <a:p>
             <a:fld id="{E31BA835-12AC-4E8F-955A-EA3F4DE2791F}" type="datetime1">
               <a:rPr lang="en-US" smtClean="0"/>
-              <a:t>3/15/26</a:t>
+              <a:t>3/17/26</a:t>
             </a:fld>
             <a:endParaRPr lang="en-US"/>
           </a:p>
@@ -4623,26 +4628,56 @@
           <a:p>
             <a:pPr algn="ctr"/>
             <a:r>
-              <a:rPr lang="en-US" dirty="0"/>
+              <a:rPr lang="en-US" dirty="0">
+                <a:solidFill>
+                  <a:schemeClr val="bg1">
+                    <a:lumMod val="95000"/>
+                  </a:schemeClr>
+                </a:solidFill>
+              </a:rPr>
               <a:t>Synthetic Clinical Stories </a:t>
             </a:r>
           </a:p>
           <a:p>
             <a:pPr algn="ctr"/>
             <a:r>
-              <a:rPr lang="en-US" dirty="0"/>
+              <a:rPr lang="en-US" dirty="0">
+                <a:solidFill>
+                  <a:schemeClr val="bg1">
+                    <a:lumMod val="95000"/>
+                  </a:schemeClr>
+                </a:solidFill>
+              </a:rPr>
               <a:t>by </a:t>
             </a:r>
             <a:r>
-              <a:rPr lang="en-US" dirty="0" err="1"/>
+              <a:rPr lang="en-US" dirty="0" err="1">
+                <a:solidFill>
+                  <a:schemeClr val="bg1">
+                    <a:lumMod val="95000"/>
+                  </a:schemeClr>
+                </a:solidFill>
+              </a:rPr>
               <a:t>Synthea</a:t>
             </a:r>
             <a:r>
-              <a:rPr lang="en-US" baseline="30000" dirty="0" err="1"/>
+              <a:rPr lang="en-US" baseline="30000" dirty="0" err="1">
+                <a:solidFill>
+                  <a:schemeClr val="bg1">
+                    <a:lumMod val="95000"/>
+                  </a:schemeClr>
+                </a:solidFill>
+              </a:rPr>
               <a:t>TM</a:t>
             </a:r>
             <a:r>
-              <a:rPr lang="en-US" dirty="0"/>
+              <a:rPr lang="en-US" dirty="0">
+                <a:solidFill>
+                  <a:schemeClr val="bg1">
+                    <a:lumMod val="95000"/>
+                  </a:schemeClr>
+                </a:solidFill>
+              </a:rPr>
               <a:t> </a:t>
             </a:r>
           </a:p>
@@ -4690,14 +4725,26 @@
           <a:p>
             <a:pPr algn="ctr"/>
             <a:r>
-              <a:rPr lang="en-US" dirty="0"/>
+              <a:rPr lang="en-US" dirty="0">
+                <a:solidFill>
+                  <a:schemeClr val="bg1">
+                    <a:lumMod val="95000"/>
+                  </a:schemeClr>
+                </a:solidFill>
+              </a:rPr>
               <a:t>32k+ Synthetic</a:t>
             </a:r>
           </a:p>
           <a:p>
             <a:pPr algn="ctr"/>
             <a:r>
-              <a:rPr lang="en-US" dirty="0"/>
+              <a:rPr lang="en-US" dirty="0">
+                <a:solidFill>
+                  <a:schemeClr val="bg1">
+                    <a:lumMod val="95000"/>
+                  </a:schemeClr>
+                </a:solidFill>
+              </a:rPr>
               <a:t>European Citizen data</a:t>
             </a:r>
           </a:p>
@@ -5672,7 +5719,13 @@
           <a:p>
             <a:pPr algn="ctr"/>
             <a:r>
-              <a:rPr lang="en-US" dirty="0"/>
+              <a:rPr lang="en-US" dirty="0">
+                <a:solidFill>
+                  <a:schemeClr val="bg1">
+                    <a:lumMod val="95000"/>
+                  </a:schemeClr>
+                </a:solidFill>
+              </a:rPr>
               <a:t>SUSHI compiler</a:t>
             </a:r>
           </a:p>
@@ -5720,23 +5773,52 @@
           <a:p>
             <a:pPr algn="ctr"/>
             <a:r>
-              <a:rPr lang="en-US" dirty="0"/>
+              <a:rPr lang="en-US" dirty="0">
+                <a:solidFill>
+                  <a:schemeClr val="bg1">
+                    <a:lumMod val="95000"/>
+                  </a:schemeClr>
+                </a:solidFill>
+              </a:rPr>
               <a:t>Conversion</a:t>
             </a:r>
             <a:br>
-              <a:rPr lang="en-US" dirty="0"/>
+              <a:rPr lang="en-US" dirty="0">
+                <a:solidFill>
+                  <a:schemeClr val="bg1">
+                    <a:lumMod val="95000"/>
+                  </a:schemeClr>
+                </a:solidFill>
+              </a:rPr>
             </a:br>
             <a:r>
-              <a:rPr lang="en-US" dirty="0"/>
+              <a:rPr lang="en-US" dirty="0">
+                <a:solidFill>
+                  <a:schemeClr val="bg1">
+                    <a:lumMod val="95000"/>
+                  </a:schemeClr>
+                </a:solidFill>
+              </a:rPr>
               <a:t>FHIR JSON </a:t>
             </a:r>
             <a:r>
               <a:rPr lang="en-US" dirty="0">
+                <a:solidFill>
+                  <a:schemeClr val="bg1">
+                    <a:lumMod val="95000"/>
+                  </a:schemeClr>
+                </a:solidFill>
                 <a:sym typeface="Wingdings" pitchFamily="2" charset="2"/>
               </a:rPr>
               <a:t>to XML</a:t>
             </a:r>
-            <a:endParaRPr lang="en-US" dirty="0"/>
+            <a:endParaRPr lang="en-US" dirty="0">
+              <a:solidFill>
+                <a:schemeClr val="bg1">
+                  <a:lumMod val="95000"/>
+                </a:schemeClr>
+              </a:solidFill>
+            </a:endParaRPr>
           </a:p>
         </p:txBody>
       </p:sp>
@@ -5782,14 +5864,32 @@
           <a:p>
             <a:pPr algn="ctr"/>
             <a:r>
-              <a:rPr lang="en-US" dirty="0"/>
+              <a:rPr lang="en-US" dirty="0">
+                <a:solidFill>
+                  <a:schemeClr val="bg1">
+                    <a:lumMod val="95000"/>
+                  </a:schemeClr>
+                </a:solidFill>
+              </a:rPr>
               <a:t>Validation of</a:t>
             </a:r>
             <a:br>
-              <a:rPr lang="en-US" dirty="0"/>
+              <a:rPr lang="en-US" dirty="0">
+                <a:solidFill>
+                  <a:schemeClr val="bg1">
+                    <a:lumMod val="95000"/>
+                  </a:schemeClr>
+                </a:solidFill>
+              </a:rPr>
             </a:br>
             <a:r>
-              <a:rPr lang="en-US" dirty="0"/>
+              <a:rPr lang="en-US" dirty="0">
+                <a:solidFill>
+                  <a:schemeClr val="bg1">
+                    <a:lumMod val="95000"/>
+                  </a:schemeClr>
+                </a:solidFill>
+              </a:rPr>
               <a:t>FHIR JSON</a:t>
             </a:r>
           </a:p>
@@ -5980,14 +6080,26 @@
           <a:p>
             <a:pPr algn="ctr"/>
             <a:r>
-              <a:rPr lang="en-US" dirty="0"/>
+              <a:rPr lang="en-US" dirty="0">
+                <a:solidFill>
+                  <a:schemeClr val="bg1">
+                    <a:lumMod val="95000"/>
+                  </a:schemeClr>
+                </a:solidFill>
+              </a:rPr>
               <a:t>AI analyzing the </a:t>
             </a:r>
           </a:p>
           <a:p>
             <a:pPr algn="ctr"/>
             <a:r>
-              <a:rPr lang="en-US" dirty="0"/>
+              <a:rPr lang="en-US" dirty="0">
+                <a:solidFill>
+                  <a:schemeClr val="bg1">
+                    <a:lumMod val="95000"/>
+                  </a:schemeClr>
+                </a:solidFill>
+              </a:rPr>
               <a:t>validation logs</a:t>
             </a:r>
           </a:p>
@@ -6035,14 +6147,32 @@
           <a:p>
             <a:pPr algn="ctr"/>
             <a:r>
-              <a:rPr lang="en-US" dirty="0"/>
+              <a:rPr lang="en-US" dirty="0">
+                <a:solidFill>
+                  <a:schemeClr val="bg1">
+                    <a:lumMod val="95000"/>
+                  </a:schemeClr>
+                </a:solidFill>
+              </a:rPr>
               <a:t>Creating SYNDERAI</a:t>
             </a:r>
             <a:br>
-              <a:rPr lang="en-US" dirty="0"/>
+              <a:rPr lang="en-US" dirty="0">
+                <a:solidFill>
+                  <a:schemeClr val="bg1">
+                    <a:lumMod val="95000"/>
+                  </a:schemeClr>
+                </a:solidFill>
+              </a:rPr>
             </a:br>
             <a:r>
-              <a:rPr lang="en-US" dirty="0"/>
+              <a:rPr lang="en-US" dirty="0">
+                <a:solidFill>
+                  <a:schemeClr val="bg1">
+                    <a:lumMod val="95000"/>
+                  </a:schemeClr>
+                </a:solidFill>
+              </a:rPr>
               <a:t>GitHub issues</a:t>
             </a:r>
           </a:p>
@@ -6090,7 +6220,13 @@
           <a:p>
             <a:pPr algn="ctr"/>
             <a:r>
-              <a:rPr lang="en-US" dirty="0"/>
+              <a:rPr lang="en-US" dirty="0">
+                <a:solidFill>
+                  <a:schemeClr val="bg1">
+                    <a:lumMod val="95000"/>
+                  </a:schemeClr>
+                </a:solidFill>
+              </a:rPr>
               <a:t>Processing GitHub issues</a:t>
             </a:r>
           </a:p>
@@ -7181,7 +7317,13 @@
           <a:p>
             <a:pPr algn="ctr"/>
             <a:r>
-              <a:rPr lang="en-US" dirty="0"/>
+              <a:rPr lang="en-US" dirty="0">
+                <a:solidFill>
+                  <a:schemeClr val="bg1">
+                    <a:lumMod val="95000"/>
+                  </a:schemeClr>
+                </a:solidFill>
+              </a:rPr>
               <a:t>SUSHI compiler</a:t>
             </a:r>
           </a:p>
@@ -7229,23 +7371,52 @@
           <a:p>
             <a:pPr algn="ctr"/>
             <a:r>
-              <a:rPr lang="en-US" dirty="0"/>
+              <a:rPr lang="en-US" dirty="0">
+                <a:solidFill>
+                  <a:schemeClr val="bg1">
+                    <a:lumMod val="95000"/>
+                  </a:schemeClr>
+                </a:solidFill>
+              </a:rPr>
               <a:t>Conversion</a:t>
             </a:r>
             <a:br>
-              <a:rPr lang="en-US" dirty="0"/>
+              <a:rPr lang="en-US" dirty="0">
+                <a:solidFill>
+                  <a:schemeClr val="bg1">
+                    <a:lumMod val="95000"/>
+                  </a:schemeClr>
+                </a:solidFill>
+              </a:rPr>
             </a:br>
             <a:r>
-              <a:rPr lang="en-US" dirty="0"/>
+              <a:rPr lang="en-US" dirty="0">
+                <a:solidFill>
+                  <a:schemeClr val="bg1">
+                    <a:lumMod val="95000"/>
+                  </a:schemeClr>
+                </a:solidFill>
+              </a:rPr>
               <a:t>FHIR JSON </a:t>
             </a:r>
             <a:r>
               <a:rPr lang="en-US" dirty="0">
+                <a:solidFill>
+                  <a:schemeClr val="bg1">
+                    <a:lumMod val="95000"/>
+                  </a:schemeClr>
+                </a:solidFill>
                 <a:sym typeface="Wingdings" pitchFamily="2" charset="2"/>
               </a:rPr>
               <a:t>to XML</a:t>
             </a:r>
-            <a:endParaRPr lang="en-US" dirty="0"/>
+            <a:endParaRPr lang="en-US" dirty="0">
+              <a:solidFill>
+                <a:schemeClr val="bg1">
+                  <a:lumMod val="95000"/>
+                </a:schemeClr>
+              </a:solidFill>
+            </a:endParaRPr>
           </a:p>
         </p:txBody>
       </p:sp>
@@ -7291,14 +7462,32 @@
           <a:p>
             <a:pPr algn="ctr"/>
             <a:r>
-              <a:rPr lang="en-US" dirty="0"/>
+              <a:rPr lang="en-US" dirty="0">
+                <a:solidFill>
+                  <a:schemeClr val="bg1">
+                    <a:lumMod val="95000"/>
+                  </a:schemeClr>
+                </a:solidFill>
+              </a:rPr>
               <a:t>Validation of</a:t>
             </a:r>
             <a:br>
-              <a:rPr lang="en-US" dirty="0"/>
+              <a:rPr lang="en-US" dirty="0">
+                <a:solidFill>
+                  <a:schemeClr val="bg1">
+                    <a:lumMod val="95000"/>
+                  </a:schemeClr>
+                </a:solidFill>
+              </a:rPr>
             </a:br>
             <a:r>
-              <a:rPr lang="en-US" dirty="0"/>
+              <a:rPr lang="en-US" dirty="0">
+                <a:solidFill>
+                  <a:schemeClr val="bg1">
+                    <a:lumMod val="95000"/>
+                  </a:schemeClr>
+                </a:solidFill>
+              </a:rPr>
               <a:t>FHIR JSON</a:t>
             </a:r>
           </a:p>
@@ -7489,7 +7678,13 @@
           <a:p>
             <a:pPr algn="ctr"/>
             <a:r>
-              <a:rPr lang="en-US" dirty="0"/>
+              <a:rPr lang="en-US" dirty="0">
+                <a:solidFill>
+                  <a:schemeClr val="bg1">
+                    <a:lumMod val="95000"/>
+                  </a:schemeClr>
+                </a:solidFill>
+              </a:rPr>
               <a:t>Waiting for semaphore processes to finish</a:t>
             </a:r>
           </a:p>
@@ -8524,7 +8719,13 @@
           <a:p>
             <a:pPr algn="ctr"/>
             <a:r>
-              <a:rPr lang="en-US" dirty="0"/>
+              <a:rPr lang="en-US" dirty="0">
+                <a:solidFill>
+                  <a:schemeClr val="bg1">
+                    <a:lumMod val="95000"/>
+                  </a:schemeClr>
+                </a:solidFill>
+              </a:rPr>
               <a:t>SUSHI compiler</a:t>
             </a:r>
           </a:p>
@@ -8572,23 +8773,52 @@
           <a:p>
             <a:pPr algn="ctr"/>
             <a:r>
-              <a:rPr lang="en-US" dirty="0"/>
+              <a:rPr lang="en-US" dirty="0">
+                <a:solidFill>
+                  <a:schemeClr val="bg1">
+                    <a:lumMod val="95000"/>
+                  </a:schemeClr>
+                </a:solidFill>
+              </a:rPr>
               <a:t>Conversion</a:t>
             </a:r>
             <a:br>
-              <a:rPr lang="en-US" dirty="0"/>
+              <a:rPr lang="en-US" dirty="0">
+                <a:solidFill>
+                  <a:schemeClr val="bg1">
+                    <a:lumMod val="95000"/>
+                  </a:schemeClr>
+                </a:solidFill>
+              </a:rPr>
             </a:br>
             <a:r>
-              <a:rPr lang="en-US" dirty="0"/>
+              <a:rPr lang="en-US" dirty="0">
+                <a:solidFill>
+                  <a:schemeClr val="bg1">
+                    <a:lumMod val="95000"/>
+                  </a:schemeClr>
+                </a:solidFill>
+              </a:rPr>
               <a:t>FHIR JSON </a:t>
             </a:r>
             <a:r>
               <a:rPr lang="en-US" dirty="0">
+                <a:solidFill>
+                  <a:schemeClr val="bg1">
+                    <a:lumMod val="95000"/>
+                  </a:schemeClr>
+                </a:solidFill>
                 <a:sym typeface="Wingdings" pitchFamily="2" charset="2"/>
               </a:rPr>
               <a:t>to XML</a:t>
             </a:r>
-            <a:endParaRPr lang="en-US" dirty="0"/>
+            <a:endParaRPr lang="en-US" dirty="0">
+              <a:solidFill>
+                <a:schemeClr val="bg1">
+                  <a:lumMod val="95000"/>
+                </a:schemeClr>
+              </a:solidFill>
+            </a:endParaRPr>
           </a:p>
         </p:txBody>
       </p:sp>
@@ -8634,14 +8864,32 @@
           <a:p>
             <a:pPr algn="ctr"/>
             <a:r>
-              <a:rPr lang="en-US" dirty="0"/>
+              <a:rPr lang="en-US" dirty="0">
+                <a:solidFill>
+                  <a:schemeClr val="bg1">
+                    <a:lumMod val="95000"/>
+                  </a:schemeClr>
+                </a:solidFill>
+              </a:rPr>
               <a:t>Validation of</a:t>
             </a:r>
             <a:br>
-              <a:rPr lang="en-US" dirty="0"/>
+              <a:rPr lang="en-US" dirty="0">
+                <a:solidFill>
+                  <a:schemeClr val="bg1">
+                    <a:lumMod val="95000"/>
+                  </a:schemeClr>
+                </a:solidFill>
+              </a:rPr>
             </a:br>
             <a:r>
-              <a:rPr lang="en-US" dirty="0"/>
+              <a:rPr lang="en-US" dirty="0">
+                <a:solidFill>
+                  <a:schemeClr val="bg1">
+                    <a:lumMod val="95000"/>
+                  </a:schemeClr>
+                </a:solidFill>
+              </a:rPr>
               <a:t>FHIR JSON</a:t>
             </a:r>
           </a:p>
@@ -8976,14 +9224,26 @@
           <a:p>
             <a:pPr algn="ctr"/>
             <a:r>
-              <a:rPr lang="en-US" dirty="0"/>
+              <a:rPr lang="en-US" dirty="0">
+                <a:solidFill>
+                  <a:schemeClr val="bg1">
+                    <a:lumMod val="95000"/>
+                  </a:schemeClr>
+                </a:solidFill>
+              </a:rPr>
               <a:t>AI analyzing the </a:t>
             </a:r>
           </a:p>
           <a:p>
             <a:pPr algn="ctr"/>
             <a:r>
-              <a:rPr lang="en-US" dirty="0"/>
+              <a:rPr lang="en-US" dirty="0">
+                <a:solidFill>
+                  <a:schemeClr val="bg1">
+                    <a:lumMod val="95000"/>
+                  </a:schemeClr>
+                </a:solidFill>
+              </a:rPr>
               <a:t>validation logs</a:t>
             </a:r>
           </a:p>
@@ -9031,14 +9291,32 @@
           <a:p>
             <a:pPr algn="ctr"/>
             <a:r>
-              <a:rPr lang="en-US" dirty="0"/>
+              <a:rPr lang="en-US" dirty="0">
+                <a:solidFill>
+                  <a:schemeClr val="bg1">
+                    <a:lumMod val="95000"/>
+                  </a:schemeClr>
+                </a:solidFill>
+              </a:rPr>
               <a:t>Creating SYNDERAI</a:t>
             </a:r>
             <a:br>
-              <a:rPr lang="en-US" dirty="0"/>
+              <a:rPr lang="en-US" dirty="0">
+                <a:solidFill>
+                  <a:schemeClr val="bg1">
+                    <a:lumMod val="95000"/>
+                  </a:schemeClr>
+                </a:solidFill>
+              </a:rPr>
             </a:br>
             <a:r>
-              <a:rPr lang="en-US" dirty="0"/>
+              <a:rPr lang="en-US" dirty="0">
+                <a:solidFill>
+                  <a:schemeClr val="bg1">
+                    <a:lumMod val="95000"/>
+                  </a:schemeClr>
+                </a:solidFill>
+              </a:rPr>
               <a:t>GitHub issues</a:t>
             </a:r>
           </a:p>
@@ -9086,7 +9364,13 @@
           <a:p>
             <a:pPr algn="ctr"/>
             <a:r>
-              <a:rPr lang="en-US" dirty="0"/>
+              <a:rPr lang="en-US" dirty="0">
+                <a:solidFill>
+                  <a:schemeClr val="bg1">
+                    <a:lumMod val="95000"/>
+                  </a:schemeClr>
+                </a:solidFill>
+              </a:rPr>
               <a:t>Processing GitHub issues</a:t>
             </a:r>
           </a:p>
